--- a/media/resources/files/Onduktar_Sandardy_iReettoo_TuuraJeKata.pptx
+++ b/media/resources/files/Onduktar_Sandardy_iReettoo_TuuraJeKata.pptx
@@ -9788,7 +9788,7 @@
                 <a:ea typeface="+mn-ea"/>
                 <a:cs typeface="+mn-cs"/>
               </a:rPr>
-              <a:t>Турдуу пикирлер учун ыраазычылык билдиребиз.</a:t>
+              <a:t>Түрдүү пикирлер үчүн ыраазычылык билдиребиз.</a:t>
             </a:r>
           </a:p>
           <a:p>

--- a/media/resources/files/Onduktar_Sandardy_iReettoo_TuuraJeKata.pptx
+++ b/media/resources/files/Onduktar_Sandardy_iReettoo_TuuraJeKata.pptx
@@ -3017,7 +3017,7 @@
             <a:pPr algn="ctr"/>
             <a:r>
               <a:rPr lang="ru-RU" sz="1400" dirty="0"/>
-              <a:t>Бардык 12 картаны кесип. Аларды эки топко иреттеңиз: ТУУРА &amp; КАТА</a:t>
+              <a:t>Бардык 12 картаны кесип. Аларды эки топко ирээттеңиз: ТУУРА &amp; КАТА</a:t>
             </a:r>
             <a:endParaRPr lang="en-GB" sz="1400" dirty="0"/>
           </a:p>
@@ -3504,7 +3504,7 @@
           <a:p>
             <a:r>
               <a:rPr lang="en-GB" sz="2800" dirty="0"/>
-              <a:t>0.65 &gt; 0.567</a:t>
+              <a:t>0,65 &gt; 0,567</a:t>
             </a:r>
           </a:p>
         </p:txBody>
@@ -3539,7 +3539,7 @@
           <a:p>
             <a:r>
               <a:rPr lang="en-GB" sz="2800" dirty="0"/>
-              <a:t>4.6 &lt; 4.09</a:t>
+              <a:t>4,6 &lt; 4,09</a:t>
             </a:r>
           </a:p>
         </p:txBody>
@@ -3574,7 +3574,7 @@
           <a:p>
             <a:r>
               <a:rPr lang="en-GB" sz="2800" dirty="0"/>
-              <a:t>0.3212 &gt; 0.3208 &gt; 0.3039</a:t>
+              <a:t>0,3212 &gt; 0,3208 &gt; 0,3039</a:t>
             </a:r>
           </a:p>
         </p:txBody>
@@ -3609,7 +3609,7 @@
           <a:p>
             <a:r>
               <a:rPr lang="en-GB" sz="2800" dirty="0"/>
-              <a:t>3.7 &lt; 3.705 &lt; 3.7105</a:t>
+              <a:t>3,7 &lt; 3,705 &lt; 3,7105</a:t>
             </a:r>
           </a:p>
         </p:txBody>
@@ -3652,7 +3652,7 @@
             <a:pPr algn="ctr"/>
             <a:r>
               <a:rPr lang="ky-KG" dirty="0"/>
-              <a:t>6.56, 6.606, 6.6056</a:t>
+              <a:t>6,56, 6,606, 6,6056</a:t>
             </a:r>
             <a:endParaRPr lang="en-GB" sz="2800" dirty="0"/>
           </a:p>
@@ -3747,7 +3747,7 @@
             <a:pPr algn="ctr"/>
             <a:r>
               <a:rPr lang="ru-RU" dirty="0"/>
-              <a:t>6.787, 6.7868, 6.71, 6.7097</a:t>
+              <a:t>6,787, 6,7868, 6,71, 6,7097</a:t>
             </a:r>
             <a:endParaRPr lang="en-GB" sz="2800" dirty="0"/>
           </a:p>
@@ -3834,7 +3834,7 @@
           <a:p>
             <a:r>
               <a:rPr lang="en-GB" sz="2800" dirty="0"/>
-              <a:t>5.76 &gt; 5.676 &gt; 5.67</a:t>
+              <a:t>5,76 &gt; 5,676 &gt; 5,67</a:t>
             </a:r>
           </a:p>
         </p:txBody>
@@ -3869,7 +3869,7 @@
           <a:p>
             <a:r>
               <a:rPr lang="en-GB" sz="2800" dirty="0"/>
-              <a:t>0.89 &lt; 0.889 &lt; 0.989</a:t>
+              <a:t>0,89 &lt; 0,889 &lt; 0,989</a:t>
             </a:r>
           </a:p>
         </p:txBody>
@@ -4514,7 +4514,7 @@
             <a:pPr algn="ctr"/>
             <a:r>
               <a:rPr lang="ru-RU" sz="1400" dirty="0"/>
-              <a:t>Бардык 12 картаны кесип. Аларды эки топко иреттеңиз: ТУУРА &amp; КАТА</a:t>
+              <a:t>Бардык 12 картаны кесип. Аларды эки топко ирээттеңиз: ТУУРА &amp; КАТА</a:t>
             </a:r>
             <a:endParaRPr lang="en-GB" sz="1400" dirty="0"/>
           </a:p>
@@ -4755,7 +4755,7 @@
           <a:p>
             <a:r>
               <a:rPr lang="en-GB" sz="2800" dirty="0"/>
-              <a:t>0.65 &gt; 0.567</a:t>
+              <a:t>0,65 &gt; 0,567</a:t>
             </a:r>
           </a:p>
         </p:txBody>
@@ -4790,7 +4790,7 @@
           <a:p>
             <a:r>
               <a:rPr lang="en-GB" sz="2800" dirty="0"/>
-              <a:t>4.6 &lt; 4.09</a:t>
+              <a:t>4,6 &lt; 4,09</a:t>
             </a:r>
           </a:p>
         </p:txBody>
@@ -4825,7 +4825,7 @@
           <a:p>
             <a:r>
               <a:rPr lang="en-GB" sz="2800" dirty="0"/>
-              <a:t>0.3212 &gt; 0.3208 &gt; 0.3039</a:t>
+              <a:t>0,3212 &gt; 0,3208 &gt; 0,3039</a:t>
             </a:r>
           </a:p>
         </p:txBody>
@@ -4860,7 +4860,7 @@
           <a:p>
             <a:r>
               <a:rPr lang="en-GB" sz="2800" dirty="0"/>
-              <a:t>3.7 &lt; 3.705 &lt; 3.7105</a:t>
+              <a:t>3,7 &lt; 3,705 &lt; 3,7105</a:t>
             </a:r>
           </a:p>
         </p:txBody>
@@ -4895,7 +4895,7 @@
           <a:p>
             <a:r>
               <a:rPr lang="en-GB" sz="2800" dirty="0"/>
-              <a:t>5.76 &gt; 5.676 &gt; 5.67</a:t>
+              <a:t>5,76 &gt; 5,676 &gt; 5,67</a:t>
             </a:r>
           </a:p>
         </p:txBody>
@@ -4930,7 +4930,7 @@
           <a:p>
             <a:r>
               <a:rPr lang="en-GB" sz="2800" dirty="0"/>
-              <a:t>0.89 &lt; 0.889 &lt; 0.989</a:t>
+              <a:t>0,89 &lt; 0,889 &lt; 0,989</a:t>
             </a:r>
           </a:p>
         </p:txBody>
@@ -6041,7 +6041,7 @@
             <a:pPr algn="ctr"/>
             <a:r>
               <a:rPr lang="ru-RU" sz="1400" dirty="0"/>
-              <a:t>Бардык 12 картаны кесип. Аларды эки топко иреттеңиз: ТУУРА &amp; КАТА</a:t>
+              <a:t>Бардык 12 картаны кесип. Аларды эки топко ирээттеңиз: ТУУРА &amp; КАТА</a:t>
             </a:r>
             <a:endParaRPr lang="en-GB" sz="1400" dirty="0"/>
           </a:p>
@@ -6528,7 +6528,7 @@
           <a:p>
             <a:r>
               <a:rPr lang="en-GB" sz="2800" dirty="0"/>
-              <a:t>0.65 &gt; 0.567</a:t>
+              <a:t>0,65 &gt; 0,567</a:t>
             </a:r>
           </a:p>
         </p:txBody>
@@ -6563,7 +6563,7 @@
           <a:p>
             <a:r>
               <a:rPr lang="en-GB" sz="2800" dirty="0"/>
-              <a:t>4.6 &lt; 4.09</a:t>
+              <a:t>4,6 &lt; 4,09</a:t>
             </a:r>
           </a:p>
         </p:txBody>
@@ -6598,7 +6598,7 @@
           <a:p>
             <a:r>
               <a:rPr lang="en-GB" sz="2800" dirty="0"/>
-              <a:t>0.3212 &gt; 0.3208 &gt; 0.3039</a:t>
+              <a:t>0,3212 &gt; 0,3208 &gt; 0,3039</a:t>
             </a:r>
           </a:p>
         </p:txBody>
@@ -6633,7 +6633,7 @@
           <a:p>
             <a:r>
               <a:rPr lang="en-GB" sz="2800" dirty="0"/>
-              <a:t>3.7 &lt; 3.705 &lt; 3.7105</a:t>
+              <a:t>3,7 &lt; 3,705 &lt; 3,7105</a:t>
             </a:r>
           </a:p>
         </p:txBody>
@@ -6676,7 +6676,7 @@
             <a:pPr algn="ctr"/>
             <a:r>
               <a:rPr lang="ky-KG" dirty="0"/>
-              <a:t>6.56, 6.606, 6.6056</a:t>
+              <a:t>6,56, 6,606, 6,6056</a:t>
             </a:r>
             <a:endParaRPr lang="en-GB" sz="2800" dirty="0"/>
           </a:p>
@@ -6771,7 +6771,7 @@
             <a:pPr algn="ctr"/>
             <a:r>
               <a:rPr lang="ru-RU" dirty="0"/>
-              <a:t>6.787, 6.7868, 6.71, 6.7097</a:t>
+              <a:t>6,787, 6,7868, 6,71, 6,7097</a:t>
             </a:r>
             <a:endParaRPr lang="en-GB" sz="2800" dirty="0"/>
           </a:p>
@@ -6858,7 +6858,7 @@
           <a:p>
             <a:r>
               <a:rPr lang="en-GB" sz="2800" dirty="0"/>
-              <a:t>5.76 &gt; 5.676 &gt; 5.67</a:t>
+              <a:t>5,76 &gt; 5,676 &gt; 5,67</a:t>
             </a:r>
           </a:p>
         </p:txBody>
@@ -6893,7 +6893,7 @@
           <a:p>
             <a:r>
               <a:rPr lang="en-GB" sz="2800" dirty="0"/>
-              <a:t>0.89 &lt; 0.889 &lt; 0.989</a:t>
+              <a:t>0,89 &lt; 0,889 &lt; 0,989</a:t>
             </a:r>
           </a:p>
         </p:txBody>
@@ -8303,7 +8303,7 @@
             <a:pPr algn="ctr"/>
             <a:r>
               <a:rPr lang="ru-RU" sz="1400" dirty="0"/>
-              <a:t>Бардык 12 картаны кесип. Аларды эки топко иреттеңиз: ТУУРА &amp; КАТА</a:t>
+              <a:t>Бардык 12 картаны кесип. Аларды эки топко ирээттеңиз: ТУУРА &amp; КАТА</a:t>
             </a:r>
             <a:endParaRPr lang="en-GB" sz="1400" dirty="0"/>
           </a:p>
@@ -8790,7 +8790,7 @@
           <a:p>
             <a:r>
               <a:rPr lang="en-GB" sz="2800" dirty="0"/>
-              <a:t>0.65 &gt; 0.567</a:t>
+              <a:t>0,65 &gt; 0,567</a:t>
             </a:r>
           </a:p>
         </p:txBody>
@@ -8825,7 +8825,7 @@
           <a:p>
             <a:r>
               <a:rPr lang="en-GB" sz="2800" dirty="0"/>
-              <a:t>4.6 &lt; 4.09</a:t>
+              <a:t>4,6 &lt; 4,09</a:t>
             </a:r>
           </a:p>
         </p:txBody>
@@ -8860,7 +8860,7 @@
           <a:p>
             <a:r>
               <a:rPr lang="en-GB" sz="2800" dirty="0"/>
-              <a:t>0.3212 &gt; 0.3208 &gt; 0.3039</a:t>
+              <a:t>0,3212 &gt; 0,3208 &gt; 0,3039</a:t>
             </a:r>
           </a:p>
         </p:txBody>
@@ -8895,7 +8895,7 @@
           <a:p>
             <a:r>
               <a:rPr lang="en-GB" sz="2800" dirty="0"/>
-              <a:t>3.7 &lt; 3.705 &lt; 3.7105</a:t>
+              <a:t>3,7 &lt; 3,705 &lt; 3,7105</a:t>
             </a:r>
           </a:p>
         </p:txBody>
@@ -8938,7 +8938,7 @@
             <a:pPr algn="ctr"/>
             <a:r>
               <a:rPr lang="ky-KG" dirty="0"/>
-              <a:t>6.56, 6.606, 6.6056</a:t>
+              <a:t>6,56, 6,606, 6,6056</a:t>
             </a:r>
             <a:endParaRPr lang="en-GB" sz="2800" dirty="0"/>
           </a:p>
@@ -9033,7 +9033,7 @@
             <a:pPr algn="ctr"/>
             <a:r>
               <a:rPr lang="ru-RU" dirty="0"/>
-              <a:t>6.787, 6.7868, 6.71, 6.7097</a:t>
+              <a:t>6,787, 6,7868, 6,71, 6,7097</a:t>
             </a:r>
             <a:endParaRPr lang="en-GB" sz="2800" dirty="0"/>
           </a:p>
@@ -9120,7 +9120,7 @@
           <a:p>
             <a:r>
               <a:rPr lang="en-GB" sz="2800" dirty="0"/>
-              <a:t>5.76 &gt; 5.676 &gt; 5.67</a:t>
+              <a:t>5,76 &gt; 5,676 &gt; 5,67</a:t>
             </a:r>
           </a:p>
         </p:txBody>
@@ -9155,7 +9155,7 @@
           <a:p>
             <a:r>
               <a:rPr lang="en-GB" sz="2800" dirty="0"/>
-              <a:t>0.89 &lt; 0.889 &lt; 0.989</a:t>
+              <a:t>0,89 &lt; 0,889 &lt; 0,989</a:t>
             </a:r>
           </a:p>
         </p:txBody>

--- a/media/resources/files/Onduktar_Sandardy_iReettoo_TuuraJeKata.pptx
+++ b/media/resources/files/Onduktar_Sandardy_iReettoo_TuuraJeKata.pptx
@@ -3696,7 +3696,7 @@
             <a:pPr algn="ctr"/>
             <a:r>
               <a:rPr lang="ru-RU" dirty="0"/>
-              <a:t>0,1201, 0,121, 0,12201</a:t>
+              <a:t>0,1201, 0,121, 0,12 201</a:t>
             </a:r>
             <a:endParaRPr lang="en-GB" sz="2800" dirty="0"/>
           </a:p>
@@ -6720,7 +6720,7 @@
             <a:pPr algn="ctr"/>
             <a:r>
               <a:rPr lang="ru-RU" dirty="0"/>
-              <a:t>0,1201, 0,121, 0,12201</a:t>
+              <a:t>0,1201, 0,121, 0,12 201</a:t>
             </a:r>
             <a:endParaRPr lang="en-GB" sz="2800" dirty="0"/>
           </a:p>
@@ -8982,7 +8982,7 @@
             <a:pPr algn="ctr"/>
             <a:r>
               <a:rPr lang="ru-RU" dirty="0"/>
-              <a:t>0,1201, 0,121, 0,12201</a:t>
+              <a:t>0,1201, 0,121, 0,12 201</a:t>
             </a:r>
             <a:endParaRPr lang="en-GB" sz="2800" dirty="0"/>
           </a:p>
